--- a/F 테스트.pptx
+++ b/F 테스트.pptx
@@ -13,8 +13,10 @@
     <p:sldId id="269" r:id="rId7"/>
     <p:sldId id="270" r:id="rId8"/>
     <p:sldId id="271" r:id="rId9"/>
-    <p:sldId id="274" r:id="rId10"/>
+    <p:sldId id="272" r:id="rId10"/>
     <p:sldId id="273" r:id="rId11"/>
+    <p:sldId id="274" r:id="rId12"/>
+    <p:sldId id="275" r:id="rId13"/>
   </p:sldIdLst>
   <p:sldSz cx="12192000" cy="6858000"/>
   <p:notesSz cx="6858000" cy="9144000"/>
@@ -252,7 +254,7 @@
           <a:p>
             <a:fld id="{5B3AD1D6-AE87-C841-B3FD-7C9F7FCAE5AE}" type="datetimeFigureOut">
               <a:rPr lang="en-US" smtClean="0"/>
-              <a:t>11/22/19</a:t>
+              <a:t>11/27/19</a:t>
             </a:fld>
             <a:endParaRPr lang="en-US"/>
           </a:p>
@@ -422,7 +424,7 @@
           <a:p>
             <a:fld id="{5B3AD1D6-AE87-C841-B3FD-7C9F7FCAE5AE}" type="datetimeFigureOut">
               <a:rPr lang="en-US" smtClean="0"/>
-              <a:t>11/22/19</a:t>
+              <a:t>11/27/19</a:t>
             </a:fld>
             <a:endParaRPr lang="en-US"/>
           </a:p>
@@ -602,7 +604,7 @@
           <a:p>
             <a:fld id="{5B3AD1D6-AE87-C841-B3FD-7C9F7FCAE5AE}" type="datetimeFigureOut">
               <a:rPr lang="en-US" smtClean="0"/>
-              <a:t>11/22/19</a:t>
+              <a:t>11/27/19</a:t>
             </a:fld>
             <a:endParaRPr lang="en-US"/>
           </a:p>
@@ -772,7 +774,7 @@
           <a:p>
             <a:fld id="{5B3AD1D6-AE87-C841-B3FD-7C9F7FCAE5AE}" type="datetimeFigureOut">
               <a:rPr lang="en-US" smtClean="0"/>
-              <a:t>11/22/19</a:t>
+              <a:t>11/27/19</a:t>
             </a:fld>
             <a:endParaRPr lang="en-US"/>
           </a:p>
@@ -1018,7 +1020,7 @@
           <a:p>
             <a:fld id="{5B3AD1D6-AE87-C841-B3FD-7C9F7FCAE5AE}" type="datetimeFigureOut">
               <a:rPr lang="en-US" smtClean="0"/>
-              <a:t>11/22/19</a:t>
+              <a:t>11/27/19</a:t>
             </a:fld>
             <a:endParaRPr lang="en-US"/>
           </a:p>
@@ -1250,7 +1252,7 @@
           <a:p>
             <a:fld id="{5B3AD1D6-AE87-C841-B3FD-7C9F7FCAE5AE}" type="datetimeFigureOut">
               <a:rPr lang="en-US" smtClean="0"/>
-              <a:t>11/22/19</a:t>
+              <a:t>11/27/19</a:t>
             </a:fld>
             <a:endParaRPr lang="en-US"/>
           </a:p>
@@ -1617,7 +1619,7 @@
           <a:p>
             <a:fld id="{5B3AD1D6-AE87-C841-B3FD-7C9F7FCAE5AE}" type="datetimeFigureOut">
               <a:rPr lang="en-US" smtClean="0"/>
-              <a:t>11/22/19</a:t>
+              <a:t>11/27/19</a:t>
             </a:fld>
             <a:endParaRPr lang="en-US"/>
           </a:p>
@@ -1735,7 +1737,7 @@
           <a:p>
             <a:fld id="{5B3AD1D6-AE87-C841-B3FD-7C9F7FCAE5AE}" type="datetimeFigureOut">
               <a:rPr lang="en-US" smtClean="0"/>
-              <a:t>11/22/19</a:t>
+              <a:t>11/27/19</a:t>
             </a:fld>
             <a:endParaRPr lang="en-US"/>
           </a:p>
@@ -1830,7 +1832,7 @@
           <a:p>
             <a:fld id="{5B3AD1D6-AE87-C841-B3FD-7C9F7FCAE5AE}" type="datetimeFigureOut">
               <a:rPr lang="en-US" smtClean="0"/>
-              <a:t>11/22/19</a:t>
+              <a:t>11/27/19</a:t>
             </a:fld>
             <a:endParaRPr lang="en-US"/>
           </a:p>
@@ -2107,7 +2109,7 @@
           <a:p>
             <a:fld id="{5B3AD1D6-AE87-C841-B3FD-7C9F7FCAE5AE}" type="datetimeFigureOut">
               <a:rPr lang="en-US" smtClean="0"/>
-              <a:t>11/22/19</a:t>
+              <a:t>11/27/19</a:t>
             </a:fld>
             <a:endParaRPr lang="en-US"/>
           </a:p>
@@ -2360,7 +2362,7 @@
           <a:p>
             <a:fld id="{5B3AD1D6-AE87-C841-B3FD-7C9F7FCAE5AE}" type="datetimeFigureOut">
               <a:rPr lang="en-US" smtClean="0"/>
-              <a:t>11/22/19</a:t>
+              <a:t>11/27/19</a:t>
             </a:fld>
             <a:endParaRPr lang="en-US"/>
           </a:p>
@@ -2573,7 +2575,7 @@
           <a:p>
             <a:fld id="{5B3AD1D6-AE87-C841-B3FD-7C9F7FCAE5AE}" type="datetimeFigureOut">
               <a:rPr lang="en-US" smtClean="0"/>
-              <a:t>11/22/19</a:t>
+              <a:t>11/27/19</a:t>
             </a:fld>
             <a:endParaRPr lang="en-US"/>
           </a:p>
@@ -3301,39 +3303,526 @@
       </p:grpSpPr>
       <p:sp>
         <p:nvSpPr>
-          <p:cNvPr id="5" name="TextBox 4"/>
-          <p:cNvSpPr txBox="1"/>
+          <p:cNvPr id="4" name="Decision 3"/>
+          <p:cNvSpPr/>
           <p:nvPr/>
         </p:nvSpPr>
         <p:spPr>
           <a:xfrm>
-            <a:off x="270933" y="355600"/>
-            <a:ext cx="4275661" cy="707886"/>
-          </a:xfrm>
-          <a:prstGeom prst="rect">
+            <a:off x="3104696" y="951223"/>
+            <a:ext cx="5913912" cy="1911927"/>
+          </a:xfrm>
+          <a:prstGeom prst="flowChartDecision">
             <a:avLst/>
           </a:prstGeom>
-          <a:noFill/>
-        </p:spPr>
-        <p:txBody>
-          <a:bodyPr wrap="square" rtlCol="0">
-            <a:spAutoFit/>
-          </a:bodyPr>
-          <a:lstStyle/>
-          <a:p>
-            <a:r>
-              <a:rPr lang="en-US" sz="4000" dirty="0">
-                <a:latin typeface="Arial Black" charset="0"/>
-                <a:ea typeface="Arial Black" charset="0"/>
-                <a:cs typeface="Arial Black" charset="0"/>
-              </a:rPr>
-              <a:t>Levene's Test</a:t>
+        </p:spPr>
+        <p:style>
+          <a:lnRef idx="2">
+            <a:schemeClr val="accent1">
+              <a:shade val="50000"/>
+            </a:schemeClr>
+          </a:lnRef>
+          <a:fillRef idx="1">
+            <a:schemeClr val="accent1"/>
+          </a:fillRef>
+          <a:effectRef idx="0">
+            <a:schemeClr val="accent1"/>
+          </a:effectRef>
+          <a:fontRef idx="minor">
+            <a:schemeClr val="lt1"/>
+          </a:fontRef>
+        </p:style>
+        <p:txBody>
+          <a:bodyPr rtlCol="0" anchor="ctr"/>
+          <a:lstStyle/>
+          <a:p>
+            <a:pPr algn="ctr"/>
+            <a:r>
+              <a:rPr lang="en-US" sz="4000" dirty="0" smtClean="0">
+                <a:latin typeface="Arial Black" charset="0"/>
+                <a:ea typeface="Arial Black" charset="0"/>
+                <a:cs typeface="Arial Black" charset="0"/>
+              </a:rPr>
+              <a:t>Normal ?</a:t>
             </a:r>
             <a:endParaRPr lang="en-US" sz="4000" dirty="0">
               <a:latin typeface="Arial Black" charset="0"/>
               <a:ea typeface="Arial Black" charset="0"/>
               <a:cs typeface="Arial Black" charset="0"/>
             </a:endParaRPr>
+          </a:p>
+        </p:txBody>
+      </p:sp>
+      <p:sp>
+        <p:nvSpPr>
+          <p:cNvPr id="5" name="Right Arrow 4"/>
+          <p:cNvSpPr/>
+          <p:nvPr/>
+        </p:nvSpPr>
+        <p:spPr>
+          <a:xfrm rot="6569770">
+            <a:off x="3660488" y="2824668"/>
+            <a:ext cx="1311644" cy="914400"/>
+          </a:xfrm>
+          <a:prstGeom prst="rightArrow">
+            <a:avLst/>
+          </a:prstGeom>
+        </p:spPr>
+        <p:style>
+          <a:lnRef idx="2">
+            <a:schemeClr val="accent1">
+              <a:shade val="50000"/>
+            </a:schemeClr>
+          </a:lnRef>
+          <a:fillRef idx="1">
+            <a:schemeClr val="accent1"/>
+          </a:fillRef>
+          <a:effectRef idx="0">
+            <a:schemeClr val="accent1"/>
+          </a:effectRef>
+          <a:fontRef idx="minor">
+            <a:schemeClr val="lt1"/>
+          </a:fontRef>
+        </p:style>
+        <p:txBody>
+          <a:bodyPr rtlCol="0" anchor="ctr"/>
+          <a:lstStyle/>
+          <a:p>
+            <a:pPr algn="ctr"/>
+            <a:endParaRPr lang="en-US"/>
+          </a:p>
+        </p:txBody>
+      </p:sp>
+      <p:sp>
+        <p:nvSpPr>
+          <p:cNvPr id="6" name="Right Arrow 5"/>
+          <p:cNvSpPr/>
+          <p:nvPr/>
+        </p:nvSpPr>
+        <p:spPr>
+          <a:xfrm rot="4169216">
+            <a:off x="7047615" y="2837873"/>
+            <a:ext cx="1286315" cy="914400"/>
+          </a:xfrm>
+          <a:prstGeom prst="rightArrow">
+            <a:avLst/>
+          </a:prstGeom>
+        </p:spPr>
+        <p:style>
+          <a:lnRef idx="2">
+            <a:schemeClr val="accent1">
+              <a:shade val="50000"/>
+            </a:schemeClr>
+          </a:lnRef>
+          <a:fillRef idx="1">
+            <a:schemeClr val="accent1"/>
+          </a:fillRef>
+          <a:effectRef idx="0">
+            <a:schemeClr val="accent1"/>
+          </a:effectRef>
+          <a:fontRef idx="minor">
+            <a:schemeClr val="lt1"/>
+          </a:fontRef>
+        </p:style>
+        <p:txBody>
+          <a:bodyPr rtlCol="0" anchor="ctr"/>
+          <a:lstStyle/>
+          <a:p>
+            <a:pPr algn="ctr"/>
+            <a:endParaRPr lang="en-US"/>
+          </a:p>
+        </p:txBody>
+      </p:sp>
+      <p:sp>
+        <p:nvSpPr>
+          <p:cNvPr id="7" name="TextBox 6"/>
+          <p:cNvSpPr txBox="1"/>
+          <p:nvPr/>
+        </p:nvSpPr>
+        <p:spPr>
+          <a:xfrm>
+            <a:off x="2579859" y="2509207"/>
+            <a:ext cx="1189621" cy="707886"/>
+          </a:xfrm>
+          <a:prstGeom prst="rect">
+            <a:avLst/>
+          </a:prstGeom>
+          <a:noFill/>
+        </p:spPr>
+        <p:txBody>
+          <a:bodyPr wrap="none" rtlCol="0">
+            <a:spAutoFit/>
+          </a:bodyPr>
+          <a:lstStyle/>
+          <a:p>
+            <a:r>
+              <a:rPr lang="en-US" sz="4000" dirty="0" smtClean="0">
+                <a:latin typeface="Arial Black" charset="0"/>
+                <a:ea typeface="Arial Black" charset="0"/>
+                <a:cs typeface="Arial Black" charset="0"/>
+              </a:rPr>
+              <a:t>Yes</a:t>
+            </a:r>
+            <a:endParaRPr lang="en-US" sz="4000" dirty="0">
+              <a:latin typeface="Arial Black" charset="0"/>
+              <a:ea typeface="Arial Black" charset="0"/>
+              <a:cs typeface="Arial Black" charset="0"/>
+            </a:endParaRPr>
+          </a:p>
+        </p:txBody>
+      </p:sp>
+      <p:sp>
+        <p:nvSpPr>
+          <p:cNvPr id="9" name="TextBox 8"/>
+          <p:cNvSpPr txBox="1"/>
+          <p:nvPr/>
+        </p:nvSpPr>
+        <p:spPr>
+          <a:xfrm flipH="1">
+            <a:off x="8218689" y="2509207"/>
+            <a:ext cx="1739786" cy="707886"/>
+          </a:xfrm>
+          <a:prstGeom prst="rect">
+            <a:avLst/>
+          </a:prstGeom>
+          <a:noFill/>
+        </p:spPr>
+        <p:txBody>
+          <a:bodyPr wrap="square" rtlCol="0">
+            <a:spAutoFit/>
+          </a:bodyPr>
+          <a:lstStyle/>
+          <a:p>
+            <a:r>
+              <a:rPr lang="en-US" sz="4000" dirty="0" smtClean="0">
+                <a:latin typeface="Arial Black" charset="0"/>
+                <a:ea typeface="Arial Black" charset="0"/>
+                <a:cs typeface="Arial Black" charset="0"/>
+              </a:rPr>
+              <a:t>No</a:t>
+            </a:r>
+            <a:endParaRPr lang="en-US" sz="4000" dirty="0">
+              <a:latin typeface="Arial Black" charset="0"/>
+              <a:ea typeface="Arial Black" charset="0"/>
+              <a:cs typeface="Arial Black" charset="0"/>
+            </a:endParaRPr>
+          </a:p>
+        </p:txBody>
+      </p:sp>
+      <p:sp>
+        <p:nvSpPr>
+          <p:cNvPr id="10" name="Alternate Process 9"/>
+          <p:cNvSpPr/>
+          <p:nvPr/>
+        </p:nvSpPr>
+        <p:spPr>
+          <a:xfrm>
+            <a:off x="1619250" y="4071278"/>
+            <a:ext cx="3346339" cy="2152650"/>
+          </a:xfrm>
+          <a:prstGeom prst="flowChartAlternateProcess">
+            <a:avLst/>
+          </a:prstGeom>
+        </p:spPr>
+        <p:style>
+          <a:lnRef idx="2">
+            <a:schemeClr val="accent1">
+              <a:shade val="50000"/>
+            </a:schemeClr>
+          </a:lnRef>
+          <a:fillRef idx="1">
+            <a:schemeClr val="accent1"/>
+          </a:fillRef>
+          <a:effectRef idx="0">
+            <a:schemeClr val="accent1"/>
+          </a:effectRef>
+          <a:fontRef idx="minor">
+            <a:schemeClr val="lt1"/>
+          </a:fontRef>
+        </p:style>
+        <p:txBody>
+          <a:bodyPr rtlCol="0" anchor="ctr"/>
+          <a:lstStyle/>
+          <a:p>
+            <a:pPr algn="ctr"/>
+            <a:r>
+              <a:rPr lang="en-US" sz="4000" dirty="0" smtClean="0">
+                <a:latin typeface="Arial Black" charset="0"/>
+                <a:ea typeface="Arial Black" charset="0"/>
+                <a:cs typeface="Arial Black" charset="0"/>
+              </a:rPr>
+              <a:t>F Test</a:t>
+            </a:r>
+            <a:endParaRPr lang="en-US" sz="4000" dirty="0">
+              <a:latin typeface="Arial Black" charset="0"/>
+              <a:ea typeface="Arial Black" charset="0"/>
+              <a:cs typeface="Arial Black" charset="0"/>
+            </a:endParaRPr>
+          </a:p>
+        </p:txBody>
+      </p:sp>
+      <p:sp>
+        <p:nvSpPr>
+          <p:cNvPr id="11" name="Alternate Process 10"/>
+          <p:cNvSpPr/>
+          <p:nvPr/>
+        </p:nvSpPr>
+        <p:spPr>
+          <a:xfrm>
+            <a:off x="7029908" y="4071278"/>
+            <a:ext cx="3352342" cy="2152650"/>
+          </a:xfrm>
+          <a:prstGeom prst="flowChartAlternateProcess">
+            <a:avLst/>
+          </a:prstGeom>
+        </p:spPr>
+        <p:style>
+          <a:lnRef idx="2">
+            <a:schemeClr val="accent1">
+              <a:shade val="50000"/>
+            </a:schemeClr>
+          </a:lnRef>
+          <a:fillRef idx="1">
+            <a:schemeClr val="accent1"/>
+          </a:fillRef>
+          <a:effectRef idx="0">
+            <a:schemeClr val="accent1"/>
+          </a:effectRef>
+          <a:fontRef idx="minor">
+            <a:schemeClr val="lt1"/>
+          </a:fontRef>
+        </p:style>
+        <p:txBody>
+          <a:bodyPr rtlCol="0" anchor="ctr"/>
+          <a:lstStyle/>
+          <a:p>
+            <a:pPr algn="ctr"/>
+            <a:r>
+              <a:rPr lang="en-US" sz="4000" dirty="0" smtClean="0">
+                <a:latin typeface="Arial Black" charset="0"/>
+                <a:ea typeface="Arial Black" charset="0"/>
+                <a:cs typeface="Arial Black" charset="0"/>
+              </a:rPr>
+              <a:t>Levene’s Test</a:t>
+            </a:r>
+            <a:endParaRPr lang="en-US" sz="4000" dirty="0">
+              <a:latin typeface="Arial Black" charset="0"/>
+              <a:ea typeface="Arial Black" charset="0"/>
+              <a:cs typeface="Arial Black" charset="0"/>
+            </a:endParaRPr>
+          </a:p>
+        </p:txBody>
+      </p:sp>
+      <p:sp>
+        <p:nvSpPr>
+          <p:cNvPr id="2" name="TextBox 1"/>
+          <p:cNvSpPr txBox="1"/>
+          <p:nvPr/>
+        </p:nvSpPr>
+        <p:spPr>
+          <a:xfrm>
+            <a:off x="262692" y="212559"/>
+            <a:ext cx="5798960" cy="707886"/>
+          </a:xfrm>
+          <a:prstGeom prst="rect">
+            <a:avLst/>
+          </a:prstGeom>
+          <a:noFill/>
+        </p:spPr>
+        <p:txBody>
+          <a:bodyPr wrap="none" rtlCol="0">
+            <a:spAutoFit/>
+          </a:bodyPr>
+          <a:lstStyle/>
+          <a:p>
+            <a:r>
+              <a:rPr lang="en-US" sz="4000" dirty="0">
+                <a:latin typeface="Arial Black" charset="0"/>
+                <a:ea typeface="Arial Black" charset="0"/>
+                <a:cs typeface="Arial Black" charset="0"/>
+              </a:rPr>
+              <a:t>Equal </a:t>
+            </a:r>
+            <a:r>
+              <a:rPr lang="en-US" sz="4000" dirty="0" smtClean="0">
+                <a:latin typeface="Arial Black" charset="0"/>
+                <a:ea typeface="Arial Black" charset="0"/>
+                <a:cs typeface="Arial Black" charset="0"/>
+              </a:rPr>
+              <a:t>Variance Test</a:t>
+            </a:r>
+            <a:endParaRPr lang="en-US" sz="4000" dirty="0">
+              <a:latin typeface="Arial Black" charset="0"/>
+              <a:ea typeface="Arial Black" charset="0"/>
+              <a:cs typeface="Arial Black" charset="0"/>
+            </a:endParaRPr>
+          </a:p>
+        </p:txBody>
+      </p:sp>
+    </p:spTree>
+    <p:extLst>
+      <p:ext uri="{BB962C8B-B14F-4D97-AF65-F5344CB8AC3E}">
+        <p14:creationId xmlns:p14="http://schemas.microsoft.com/office/powerpoint/2010/main" val="689830658"/>
+      </p:ext>
+    </p:extLst>
+  </p:cSld>
+  <p:clrMapOvr>
+    <a:masterClrMapping/>
+  </p:clrMapOvr>
+</p:sld>
+</file>
+
+<file path=ppt/slides/slide11.xml><?xml version="1.0" encoding="utf-8"?>
+<p:sld xmlns:a="http://schemas.openxmlformats.org/drawingml/2006/main" xmlns:r="http://schemas.openxmlformats.org/officeDocument/2006/relationships" xmlns:p="http://schemas.openxmlformats.org/presentationml/2006/main">
+  <p:cSld>
+    <p:spTree>
+      <p:nvGrpSpPr>
+        <p:cNvPr id="1" name=""/>
+        <p:cNvGrpSpPr/>
+        <p:nvPr/>
+      </p:nvGrpSpPr>
+      <p:grpSpPr>
+        <a:xfrm>
+          <a:off x="0" y="0"/>
+          <a:ext cx="0" cy="0"/>
+          <a:chOff x="0" y="0"/>
+          <a:chExt cx="0" cy="0"/>
+        </a:xfrm>
+      </p:grpSpPr>
+      <p:pic>
+        <p:nvPicPr>
+          <p:cNvPr id="4" name="Picture 3"/>
+          <p:cNvPicPr>
+            <a:picLocks noChangeAspect="1"/>
+          </p:cNvPicPr>
+          <p:nvPr/>
+        </p:nvPicPr>
+        <p:blipFill>
+          <a:blip r:embed="rId2">
+            <a:extLst>
+              <a:ext uri="{28A0092B-C50C-407E-A947-70E740481C1C}">
+                <a14:useLocalDpi xmlns:a14="http://schemas.microsoft.com/office/drawing/2010/main" val="0"/>
+              </a:ext>
+            </a:extLst>
+          </a:blip>
+          <a:stretch>
+            <a:fillRect/>
+          </a:stretch>
+        </p:blipFill>
+        <p:spPr>
+          <a:xfrm>
+            <a:off x="1386982" y="485639"/>
+            <a:ext cx="9791700" cy="4495800"/>
+          </a:xfrm>
+          <a:prstGeom prst="rect">
+            <a:avLst/>
+          </a:prstGeom>
+        </p:spPr>
+      </p:pic>
+      <p:sp>
+        <p:nvSpPr>
+          <p:cNvPr id="10" name="TextBox 9"/>
+          <p:cNvSpPr txBox="1"/>
+          <p:nvPr/>
+        </p:nvSpPr>
+        <p:spPr>
+          <a:xfrm>
+            <a:off x="4571999" y="6233375"/>
+            <a:ext cx="7186412" cy="369332"/>
+          </a:xfrm>
+          <a:prstGeom prst="rect">
+            <a:avLst/>
+          </a:prstGeom>
+          <a:noFill/>
+        </p:spPr>
+        <p:txBody>
+          <a:bodyPr wrap="square" rtlCol="0">
+            <a:spAutoFit/>
+          </a:bodyPr>
+          <a:lstStyle/>
+          <a:p>
+            <a:r>
+              <a:rPr lang="en-US" dirty="0">
+                <a:hlinkClick r:id="rId3"/>
+              </a:rPr>
+              <a:t>https://www.itl.nist.gov/div898/handbook/</a:t>
+            </a:r>
+            <a:r>
+              <a:rPr lang="en-US" dirty="0" err="1">
+                <a:hlinkClick r:id="rId3"/>
+              </a:rPr>
+              <a:t>eda</a:t>
+            </a:r>
+            <a:r>
+              <a:rPr lang="en-US" dirty="0">
+                <a:hlinkClick r:id="rId3"/>
+              </a:rPr>
+              <a:t>/section3/eda35a.htm</a:t>
+            </a:r>
+            <a:endParaRPr lang="en-US" dirty="0"/>
+          </a:p>
+        </p:txBody>
+      </p:sp>
+    </p:spTree>
+    <p:extLst>
+      <p:ext uri="{BB962C8B-B14F-4D97-AF65-F5344CB8AC3E}">
+        <p14:creationId xmlns:p14="http://schemas.microsoft.com/office/powerpoint/2010/main" val="1574851240"/>
+      </p:ext>
+    </p:extLst>
+  </p:cSld>
+  <p:clrMapOvr>
+    <a:masterClrMapping/>
+  </p:clrMapOvr>
+</p:sld>
+</file>
+
+<file path=ppt/slides/slide12.xml><?xml version="1.0" encoding="utf-8"?>
+<p:sld xmlns:a="http://schemas.openxmlformats.org/drawingml/2006/main" xmlns:r="http://schemas.openxmlformats.org/officeDocument/2006/relationships" xmlns:p="http://schemas.openxmlformats.org/presentationml/2006/main">
+  <p:cSld>
+    <p:spTree>
+      <p:nvGrpSpPr>
+        <p:cNvPr id="1" name=""/>
+        <p:cNvGrpSpPr/>
+        <p:nvPr/>
+      </p:nvGrpSpPr>
+      <p:grpSpPr>
+        <a:xfrm>
+          <a:off x="0" y="0"/>
+          <a:ext cx="0" cy="0"/>
+          <a:chOff x="0" y="0"/>
+          <a:chExt cx="0" cy="0"/>
+        </a:xfrm>
+      </p:grpSpPr>
+      <p:sp>
+        <p:nvSpPr>
+          <p:cNvPr id="5" name="TextBox 4"/>
+          <p:cNvSpPr txBox="1"/>
+          <p:nvPr/>
+        </p:nvSpPr>
+        <p:spPr>
+          <a:xfrm>
+            <a:off x="270933" y="355600"/>
+            <a:ext cx="4275661" cy="707886"/>
+          </a:xfrm>
+          <a:prstGeom prst="rect">
+            <a:avLst/>
+          </a:prstGeom>
+          <a:noFill/>
+        </p:spPr>
+        <p:txBody>
+          <a:bodyPr wrap="square" rtlCol="0">
+            <a:spAutoFit/>
+          </a:bodyPr>
+          <a:lstStyle/>
+          <a:p>
+            <a:r>
+              <a:rPr lang="en-US" sz="4000" dirty="0">
+                <a:latin typeface="Arial Black" charset="0"/>
+                <a:ea typeface="Arial Black" charset="0"/>
+                <a:cs typeface="Arial Black" charset="0"/>
+              </a:rPr>
+              <a:t>Levene's Test</a:t>
+            </a:r>
           </a:p>
         </p:txBody>
       </p:sp>
@@ -3460,7 +3949,7 @@
     </p:spTree>
     <p:extLst>
       <p:ext uri="{BB962C8B-B14F-4D97-AF65-F5344CB8AC3E}">
-        <p14:creationId xmlns:p14="http://schemas.microsoft.com/office/powerpoint/2010/main" val="1854145632"/>
+        <p14:creationId xmlns:p14="http://schemas.microsoft.com/office/powerpoint/2010/main" val="873104234"/>
       </p:ext>
     </p:extLst>
   </p:cSld>
@@ -4099,15 +4588,7 @@
                 <a:ea typeface="Arial Black" charset="0"/>
                 <a:cs typeface="Arial Black" charset="0"/>
               </a:rPr>
-              <a:t>One</a:t>
-            </a:r>
-            <a:r>
-              <a:rPr lang="en-US" sz="4000" dirty="0" smtClean="0">
-                <a:latin typeface="Arial Black" charset="0"/>
-                <a:ea typeface="Arial Black" charset="0"/>
-                <a:cs typeface="Arial Black" charset="0"/>
-              </a:rPr>
-              <a:t>-Tail Test</a:t>
+              <a:t>One-Tail Test</a:t>
             </a:r>
             <a:endParaRPr lang="en-US" sz="4000" dirty="0">
               <a:latin typeface="Arial Black" charset="0"/>
@@ -4378,76 +4859,226 @@
           <a:chExt cx="0" cy="0"/>
         </a:xfrm>
       </p:grpSpPr>
-      <p:pic>
-        <p:nvPicPr>
-          <p:cNvPr id="4" name="Picture 3"/>
-          <p:cNvPicPr>
-            <a:picLocks noChangeAspect="1"/>
-          </p:cNvPicPr>
-          <p:nvPr/>
-        </p:nvPicPr>
-        <p:blipFill>
-          <a:blip r:embed="rId2">
-            <a:extLst>
-              <a:ext uri="{28A0092B-C50C-407E-A947-70E740481C1C}">
-                <a14:useLocalDpi xmlns:a14="http://schemas.microsoft.com/office/drawing/2010/main" val="0"/>
-              </a:ext>
-            </a:extLst>
-          </a:blip>
-          <a:stretch>
-            <a:fillRect/>
-          </a:stretch>
-        </p:blipFill>
-        <p:spPr>
-          <a:xfrm>
-            <a:off x="1386982" y="485639"/>
-            <a:ext cx="9791700" cy="4495800"/>
-          </a:xfrm>
-          <a:prstGeom prst="rect">
-            <a:avLst/>
-          </a:prstGeom>
-        </p:spPr>
-      </p:pic>
-      <p:sp>
-        <p:nvSpPr>
-          <p:cNvPr id="10" name="TextBox 9"/>
-          <p:cNvSpPr txBox="1"/>
-          <p:nvPr/>
-        </p:nvSpPr>
-        <p:spPr>
-          <a:xfrm>
-            <a:off x="4571999" y="6233375"/>
-            <a:ext cx="7186412" cy="369332"/>
-          </a:xfrm>
-          <a:prstGeom prst="rect">
-            <a:avLst/>
-          </a:prstGeom>
-          <a:noFill/>
-        </p:spPr>
-        <p:txBody>
-          <a:bodyPr wrap="square" rtlCol="0">
-            <a:spAutoFit/>
+      <p:sp>
+        <p:nvSpPr>
+          <p:cNvPr id="2" name="Title 1"/>
+          <p:cNvSpPr>
+            <a:spLocks noGrp="1"/>
+          </p:cNvSpPr>
+          <p:nvPr>
+            <p:ph type="ctrTitle"/>
+          </p:nvPr>
+        </p:nvSpPr>
+        <p:spPr/>
+        <p:txBody>
+          <a:bodyPr>
+            <a:normAutofit fontScale="90000"/>
           </a:bodyPr>
           <a:lstStyle/>
           <a:p>
             <a:r>
-              <a:rPr lang="en-US" dirty="0">
-                <a:hlinkClick r:id="rId3"/>
-              </a:rPr>
-              <a:t>https://www.itl.nist.gov/div898/handbook/</a:t>
-            </a:r>
-            <a:r>
-              <a:rPr lang="en-US" dirty="0" err="1">
-                <a:hlinkClick r:id="rId3"/>
-              </a:rPr>
-              <a:t>eda</a:t>
-            </a:r>
-            <a:r>
-              <a:rPr lang="en-US" dirty="0">
-                <a:hlinkClick r:id="rId3"/>
-              </a:rPr>
-              <a:t>/section3/eda35a.htm</a:t>
-            </a:r>
+              <a:rPr lang="en-US" sz="4000" dirty="0" smtClean="0">
+                <a:latin typeface="Arial Black" charset="0"/>
+                <a:ea typeface="Arial Black" charset="0"/>
+                <a:cs typeface="Arial Black" charset="0"/>
+              </a:rPr>
+              <a:t/>
+            </a:r>
+            <a:br>
+              <a:rPr lang="en-US" sz="4000" dirty="0" smtClean="0">
+                <a:latin typeface="Arial Black" charset="0"/>
+                <a:ea typeface="Arial Black" charset="0"/>
+                <a:cs typeface="Arial Black" charset="0"/>
+              </a:rPr>
+            </a:br>
+            <a:r>
+              <a:rPr lang="en-US" sz="4000" dirty="0">
+                <a:latin typeface="Arial Black" charset="0"/>
+                <a:ea typeface="Arial Black" charset="0"/>
+                <a:cs typeface="Arial Black" charset="0"/>
+              </a:rPr>
+              <a:t/>
+            </a:r>
+            <a:br>
+              <a:rPr lang="en-US" sz="4000" dirty="0">
+                <a:latin typeface="Arial Black" charset="0"/>
+                <a:ea typeface="Arial Black" charset="0"/>
+                <a:cs typeface="Arial Black" charset="0"/>
+              </a:rPr>
+            </a:br>
+            <a:r>
+              <a:rPr lang="en-US" sz="4000" dirty="0" smtClean="0">
+                <a:latin typeface="Arial Black" charset="0"/>
+                <a:ea typeface="Arial Black" charset="0"/>
+                <a:cs typeface="Arial Black" charset="0"/>
+              </a:rPr>
+              <a:t/>
+            </a:r>
+            <a:br>
+              <a:rPr lang="en-US" sz="4000" dirty="0" smtClean="0">
+                <a:latin typeface="Arial Black" charset="0"/>
+                <a:ea typeface="Arial Black" charset="0"/>
+                <a:cs typeface="Arial Black" charset="0"/>
+              </a:rPr>
+            </a:br>
+            <a:r>
+              <a:rPr lang="en-US" sz="4000" dirty="0">
+                <a:latin typeface="Arial Black" charset="0"/>
+                <a:ea typeface="Arial Black" charset="0"/>
+                <a:cs typeface="Arial Black" charset="0"/>
+              </a:rPr>
+              <a:t/>
+            </a:r>
+            <a:br>
+              <a:rPr lang="en-US" sz="4000" dirty="0">
+                <a:latin typeface="Arial Black" charset="0"/>
+                <a:ea typeface="Arial Black" charset="0"/>
+                <a:cs typeface="Arial Black" charset="0"/>
+              </a:rPr>
+            </a:br>
+            <a:r>
+              <a:rPr lang="en-US" sz="4000" dirty="0" smtClean="0">
+                <a:latin typeface="Arial Black" charset="0"/>
+                <a:ea typeface="Arial Black" charset="0"/>
+                <a:cs typeface="Arial Black" charset="0"/>
+              </a:rPr>
+              <a:t/>
+            </a:r>
+            <a:br>
+              <a:rPr lang="en-US" sz="4000" dirty="0" smtClean="0">
+                <a:latin typeface="Arial Black" charset="0"/>
+                <a:ea typeface="Arial Black" charset="0"/>
+                <a:cs typeface="Arial Black" charset="0"/>
+              </a:rPr>
+            </a:br>
+            <a:r>
+              <a:rPr lang="en-US" sz="4000" dirty="0">
+                <a:latin typeface="Arial Black" charset="0"/>
+                <a:ea typeface="Arial Black" charset="0"/>
+                <a:cs typeface="Arial Black" charset="0"/>
+              </a:rPr>
+              <a:t/>
+            </a:r>
+            <a:br>
+              <a:rPr lang="en-US" sz="4000" dirty="0">
+                <a:latin typeface="Arial Black" charset="0"/>
+                <a:ea typeface="Arial Black" charset="0"/>
+                <a:cs typeface="Arial Black" charset="0"/>
+              </a:rPr>
+            </a:br>
+            <a:r>
+              <a:rPr lang="en-US" sz="4000" dirty="0" smtClean="0">
+                <a:latin typeface="Arial Black" charset="0"/>
+                <a:ea typeface="Arial Black" charset="0"/>
+                <a:cs typeface="Arial Black" charset="0"/>
+              </a:rPr>
+              <a:t/>
+            </a:r>
+            <a:br>
+              <a:rPr lang="en-US" sz="4000" dirty="0" smtClean="0">
+                <a:latin typeface="Arial Black" charset="0"/>
+                <a:ea typeface="Arial Black" charset="0"/>
+                <a:cs typeface="Arial Black" charset="0"/>
+              </a:rPr>
+            </a:br>
+            <a:r>
+              <a:rPr lang="en-US" sz="4000" dirty="0">
+                <a:latin typeface="Arial Black" charset="0"/>
+                <a:ea typeface="Arial Black" charset="0"/>
+                <a:cs typeface="Arial Black" charset="0"/>
+              </a:rPr>
+              <a:t/>
+            </a:r>
+            <a:br>
+              <a:rPr lang="en-US" sz="4000" dirty="0">
+                <a:latin typeface="Arial Black" charset="0"/>
+                <a:ea typeface="Arial Black" charset="0"/>
+                <a:cs typeface="Arial Black" charset="0"/>
+              </a:rPr>
+            </a:br>
+            <a:r>
+              <a:rPr lang="en-US" sz="4000" dirty="0" smtClean="0">
+                <a:latin typeface="Arial Black" charset="0"/>
+                <a:ea typeface="Arial Black" charset="0"/>
+                <a:cs typeface="Arial Black" charset="0"/>
+              </a:rPr>
+              <a:t/>
+            </a:r>
+            <a:br>
+              <a:rPr lang="en-US" sz="4000" dirty="0" smtClean="0">
+                <a:latin typeface="Arial Black" charset="0"/>
+                <a:ea typeface="Arial Black" charset="0"/>
+                <a:cs typeface="Arial Black" charset="0"/>
+              </a:rPr>
+            </a:br>
+            <a:r>
+              <a:rPr lang="en-US" sz="4000" dirty="0">
+                <a:latin typeface="Arial Black" charset="0"/>
+                <a:ea typeface="Arial Black" charset="0"/>
+                <a:cs typeface="Arial Black" charset="0"/>
+              </a:rPr>
+              <a:t/>
+            </a:r>
+            <a:br>
+              <a:rPr lang="en-US" sz="4000" dirty="0">
+                <a:latin typeface="Arial Black" charset="0"/>
+                <a:ea typeface="Arial Black" charset="0"/>
+                <a:cs typeface="Arial Black" charset="0"/>
+              </a:rPr>
+            </a:br>
+            <a:r>
+              <a:rPr lang="en-US" sz="4000" dirty="0" smtClean="0">
+                <a:latin typeface="Arial Black" charset="0"/>
+                <a:ea typeface="Arial Black" charset="0"/>
+                <a:cs typeface="Arial Black" charset="0"/>
+              </a:rPr>
+              <a:t/>
+            </a:r>
+            <a:br>
+              <a:rPr lang="en-US" sz="4000" dirty="0" smtClean="0">
+                <a:latin typeface="Arial Black" charset="0"/>
+                <a:ea typeface="Arial Black" charset="0"/>
+                <a:cs typeface="Arial Black" charset="0"/>
+              </a:rPr>
+            </a:br>
+            <a:r>
+              <a:rPr lang="en-US" sz="4400" dirty="0" smtClean="0">
+                <a:latin typeface="Arial Black" charset="0"/>
+                <a:ea typeface="Arial Black" charset="0"/>
+                <a:cs typeface="Arial Black" charset="0"/>
+              </a:rPr>
+              <a:t/>
+            </a:r>
+            <a:br>
+              <a:rPr lang="en-US" sz="4400" dirty="0" smtClean="0">
+                <a:latin typeface="Arial Black" charset="0"/>
+                <a:ea typeface="Arial Black" charset="0"/>
+                <a:cs typeface="Arial Black" charset="0"/>
+              </a:rPr>
+            </a:br>
+            <a:r>
+              <a:rPr lang="en-US" sz="6700" dirty="0">
+                <a:latin typeface="Arial Black" charset="0"/>
+                <a:ea typeface="Arial Black" charset="0"/>
+                <a:cs typeface="Arial Black" charset="0"/>
+              </a:rPr>
+              <a:t> </a:t>
+            </a:r>
+            <a:r>
+              <a:rPr lang="en-US" sz="6700" dirty="0" smtClean="0">
+                <a:latin typeface="Arial Black" charset="0"/>
+                <a:ea typeface="Arial Black" charset="0"/>
+                <a:cs typeface="Arial Black" charset="0"/>
+              </a:rPr>
+              <a:t>Levene’s Test</a:t>
+            </a:r>
+            <a:br>
+              <a:rPr lang="en-US" sz="6700" dirty="0" smtClean="0">
+                <a:latin typeface="Arial Black" charset="0"/>
+                <a:ea typeface="Arial Black" charset="0"/>
+                <a:cs typeface="Arial Black" charset="0"/>
+              </a:rPr>
+            </a:br>
             <a:endParaRPr lang="en-US" dirty="0"/>
           </a:p>
         </p:txBody>
@@ -4455,13 +5086,20 @@
     </p:spTree>
     <p:extLst>
       <p:ext uri="{BB962C8B-B14F-4D97-AF65-F5344CB8AC3E}">
-        <p14:creationId xmlns:p14="http://schemas.microsoft.com/office/powerpoint/2010/main" val="1085977590"/>
+        <p14:creationId xmlns:p14="http://schemas.microsoft.com/office/powerpoint/2010/main" val="379561258"/>
       </p:ext>
     </p:extLst>
   </p:cSld>
   <p:clrMapOvr>
     <a:masterClrMapping/>
   </p:clrMapOvr>
+  <p:timing>
+    <p:tnLst>
+      <p:par>
+        <p:cTn id="1" dur="indefinite" restart="never" nodeType="tmRoot"/>
+      </p:par>
+    </p:tnLst>
+  </p:timing>
 </p:sld>
 </file>
 
